--- a/ios/Verification/office-layout/OfficeSamplePriceList.pptx
+++ b/ios/Verification/office-layout/OfficeSamplePriceList.pptx
@@ -1812,7 +1812,7 @@
                 <a:ea typeface="Malgun Gothic"/>
                 <a:cs typeface="Arial"/>
               </a:rPr>
-              <a:t> trust'.</a:t>
+              <a:t> trust.</a:t>
             </a:r>
           </a:p>
         </p:txBody>
@@ -2014,7 +2014,7 @@
                 <a:ea typeface="Malgun Gothic"/>
                 <a:cs typeface="Arial"/>
               </a:rPr>
-              <a:t>CONCERT</a:t>
+              <a:t>CONCERT®</a:t>
             </a:r>
           </a:p>
         </p:txBody>

--- a/ios/Verification/office-layout/OfficeSamplePriceList.pptx
+++ b/ios/Verification/office-layout/OfficeSamplePriceList.pptx
@@ -1345,7 +1345,7 @@
               <a:buNone/>
             </a:pPr>
             <a:r>
-              <a:rPr lang="en-US" sz="2550" spc="169" dirty="0">
+              <a:rPr lang="en-US" sz="2266" spc="169" dirty="0">
                 <a:solidFill>
                   <a:srgbClr val="000000"/>
                 </a:solidFill>
